--- a/slides/pptx/lecture05_cnns.pptx
+++ b/slides/pptx/lecture05_cnns.pptx
@@ -2024,7 +2024,7 @@
           <a:lstStyle/>
           <a:p>
             <a:r>
-              <a:t>YOU-DO = Quiz 5 Q4 (the same reframe, now stated by the room; it assesses the detection outcome). Answer: the BOX is the peak's retention-time (or m/z) window — the integration bounds marking where the peak starts and ends along the axis; the SCORE is the model's confidence, from 0 to 1, that the boxed region is a genuine peak rather than baseline noise or an artifact (i.e. how sure it is the object is really there / really a good peak). Any answer capturing "box = the RT/m/z integration window bounding the peak" and "score = confidence it's a real peak" earns full credit. Matches the Quiz 5 key. Take one answer from the floor, then have them fill Q4.</a:t>
+              <a:t>YOU-DO = Quiz 5 Q4 — a DECIDE beat, not "restate the mapping." The scores are the given data; each box = that peak's RT integration window (stated on the I-do slide before this). Answers: (a) integrate the 0.95 box — a confident, genuine peak; the 0.30 box is a low-confidence shoulder/noise the model is unsure is real, so flag-for-review or drop it. (b) threshold 0.5 keeps only the 0.95 peak (0.30 &lt; 0.5 is dropped) → 1 clean peak; threshold 0.2 keeps BOTH (0.30 ≥ 0.2) → the dubious bump gets integrated too. (c) lowering the threshold catches more real peaks (higher sensitivity/recall) but admits more false ones (lower specificity/ precision) — the exact threshold trade-off from Lectures 4 and 10, and the SCORE is the dial that lets you choose. Have a pair make the 0.5-vs-0.2 call before revealing, then fill Q4.</a:t>
             </a:r>
           </a:p>
           <a:p/>
@@ -11502,7 +11502,7 @@
         <p:spPr>
           <a:xfrm>
             <a:off x="548640" y="731520"/>
-            <a:ext cx="11064240" cy="1005840"/>
+            <a:ext cx="11064240" cy="1127760"/>
           </a:xfrm>
           <a:prstGeom prst="rect">
             <a:avLst/>
@@ -11522,7 +11522,7 @@
                 </a:solidFill>
                 <a:latin typeface="Avenir Next"/>
               </a:rPr>
-              <a:t>Name the box and the score</a:t>
+              <a:t>Read the detector's calls — which do you trust?</a:t>
             </a:r>
           </a:p>
         </p:txBody>
@@ -11560,7 +11560,7 @@
         <p:spPr>
           <a:xfrm>
             <a:off x="548640" y="5486400"/>
-            <a:ext cx="10515600" cy="923544"/>
+            <a:ext cx="10515600" cy="1182624"/>
           </a:xfrm>
           <a:prstGeom prst="rect">
             <a:avLst/>
@@ -11610,7 +11610,7 @@
                 </a:solidFill>
                 <a:latin typeface="Avenir Next"/>
               </a:rPr>
-              <a:t>Your turn → Quiz 5, Q4. For a CNN doing peak detection on a chromatogram: what does the bounding BOX correspond to, and what does the confidence SCORE mean? One line each. Worked answer in the notes.</a:t>
+              <a:t>Your turn → Quiz 5, Q4. The detector boxed two candidates: a sharp peak at score 0.95 and a small shoulder at 0.30. (a) Which do you integrate, and what does the 0.30 tell you? (b) Which peaks survive a 0.5 threshold? A 0.2 threshold? (c) What does lowering the threshold trade off? Worked answer in the notes.</a:t>
             </a:r>
           </a:p>
         </p:txBody>

--- a/slides/pptx/lecture05_cnns.pptx
+++ b/slides/pptx/lecture05_cnns.pptx
@@ -5256,7 +5256,7 @@
         <p:spPr>
           <a:xfrm>
             <a:off x="548640" y="731520"/>
-            <a:ext cx="11064240" cy="615553"/>
+            <a:ext cx="11064240" cy="1146048"/>
           </a:xfrm>
           <a:prstGeom prst="rect">
             <a:avLst/>
@@ -5324,7 +5324,7 @@
         </p:blipFill>
         <p:spPr>
           <a:xfrm>
-            <a:off x="1483500" y="1828800"/>
+            <a:off x="1483500" y="1932432"/>
             <a:ext cx="9194519" cy="3566160"/>
           </a:xfrm>
           <a:prstGeom prst="rect">
@@ -6420,7 +6420,7 @@
         <p:spPr>
           <a:xfrm>
             <a:off x="548640" y="1920240"/>
-            <a:ext cx="10789920" cy="3508653"/>
+            <a:ext cx="10789920" cy="3797808"/>
           </a:xfrm>
           <a:prstGeom prst="rect">
             <a:avLst/>
@@ -8484,7 +8484,7 @@
         </p:nvSpPr>
         <p:spPr>
           <a:xfrm>
-            <a:off x="548640" y="320040"/>
+            <a:off x="548640" y="1295400"/>
             <a:ext cx="10972800" cy="365760"/>
           </a:xfrm>
           <a:prstGeom prst="rect">
@@ -8518,7 +8518,7 @@
         </p:nvSpPr>
         <p:spPr>
           <a:xfrm>
-            <a:off x="548640" y="731520"/>
+            <a:off x="548640" y="112776"/>
             <a:ext cx="11064240" cy="1127760"/>
           </a:xfrm>
           <a:prstGeom prst="rect">
@@ -10072,7 +10072,7 @@
         <p:spPr>
           <a:xfrm>
             <a:off x="6309360" y="2011680"/>
-            <a:ext cx="5394960" cy="3657600"/>
+            <a:ext cx="5394960" cy="3328416"/>
           </a:xfrm>
           <a:prstGeom prst="rect">
             <a:avLst/>
@@ -12607,7 +12607,7 @@
         <p:spPr>
           <a:xfrm>
             <a:off x="6309360" y="2011680"/>
-            <a:ext cx="5394960" cy="3657600"/>
+            <a:ext cx="5394960" cy="3328416"/>
           </a:xfrm>
           <a:prstGeom prst="rect">
             <a:avLst/>
@@ -13247,7 +13247,7 @@
         <p:spPr>
           <a:xfrm>
             <a:off x="6309360" y="2011680"/>
-            <a:ext cx="5394960" cy="3657600"/>
+            <a:ext cx="5394960" cy="3328416"/>
           </a:xfrm>
           <a:prstGeom prst="rect">
             <a:avLst/>
@@ -14072,7 +14072,7 @@
         <p:spPr>
           <a:xfrm>
             <a:off x="2426208" y="3765060"/>
-            <a:ext cx="2906395" cy="756920"/>
+            <a:ext cx="2906395" cy="1140968"/>
           </a:xfrm>
           <a:prstGeom prst="rect">
             <a:avLst/>
@@ -14199,7 +14199,7 @@
         <p:spPr>
           <a:xfrm>
             <a:off x="3269107" y="1752491"/>
-            <a:ext cx="1417320" cy="391160"/>
+            <a:ext cx="1417320" cy="775208"/>
           </a:xfrm>
           <a:prstGeom prst="rect">
             <a:avLst/>
@@ -16162,7 +16162,7 @@
         <p:spPr>
           <a:xfrm>
             <a:off x="9181338" y="3461098"/>
-            <a:ext cx="1462405" cy="758190"/>
+            <a:ext cx="1462405" cy="1507363"/>
           </a:xfrm>
           <a:prstGeom prst="rect">
             <a:avLst/>

--- a/slides/pptx/lecture05_cnns.pptx
+++ b/slides/pptx/lecture05_cnns.pptx
@@ -8484,7 +8484,7 @@
         </p:nvSpPr>
         <p:spPr>
           <a:xfrm>
-            <a:off x="548640" y="1295400"/>
+            <a:off x="548640" y="320040"/>
             <a:ext cx="10972800" cy="365760"/>
           </a:xfrm>
           <a:prstGeom prst="rect">
@@ -8518,7 +8518,7 @@
         </p:nvSpPr>
         <p:spPr>
           <a:xfrm>
-            <a:off x="548640" y="112776"/>
+            <a:off x="548640" y="731520"/>
             <a:ext cx="11064240" cy="1127760"/>
           </a:xfrm>
           <a:prstGeom prst="rect">
@@ -8566,8 +8566,8 @@
         </p:blipFill>
         <p:spPr>
           <a:xfrm>
-            <a:off x="2148840" y="1295400"/>
-            <a:ext cx="7772400" cy="4947687"/>
+            <a:off x="2417965" y="1901952"/>
+            <a:ext cx="7355765" cy="4681728"/>
           </a:xfrm>
           <a:prstGeom prst="rect">
             <a:avLst/>

--- a/slides/pptx/lecture05_cnns.pptx
+++ b/slides/pptx/lecture05_cnns.pptx
@@ -10947,8 +10947,13 @@
           <a:lstStyle/>
           <a:p>
             <a:r>
-              <a:rPr lang="en-US" dirty="0"/>
-              <a:t>CNN Object detection</a:t>
+              <a:rPr sz="1300" b="1" i="0">
+                <a:solidFill>
+                  <a:srgbClr val="8A9099"/>
+                </a:solidFill>
+                <a:latin typeface="Menlo"/>
+              </a:rPr>
+              <a:t>DETECTION · YOLOV7</a:t>
             </a:r>
           </a:p>
         </p:txBody>
@@ -13911,8 +13916,13 @@
           <a:lstStyle/>
           <a:p>
             <a:r>
-              <a:rPr lang="en-US" dirty="0"/>
-              <a:t>How to CNN - overview</a:t>
+              <a:rPr sz="1300" b="1" i="0">
+                <a:solidFill>
+                  <a:srgbClr val="8A9099"/>
+                </a:solidFill>
+                <a:latin typeface="Menlo"/>
+              </a:rPr>
+              <a:t>CNN ARCHITECTURE · THE OVERVIEW</a:t>
             </a:r>
           </a:p>
         </p:txBody>

--- a/slides/pptx/lecture05_cnns.pptx
+++ b/slides/pptx/lecture05_cnns.pptx
@@ -2208,11 +2208,28 @@
           <a:lstStyle/>
           <a:p>
             <a:r>
-              <a:t>Melnikov et al., Analytical Chemistry 2020 — full citation on the reading list handout. The pipeline is precisely the detection reframe made real: take a candidate region of interest from raw LC-MS, one CNN decides peak vs. noise (the score), a second CNN finds the boundaries (the box), then integrate and report the area. Lineage if asked: PeakOnly (2020) → EVA (2021) → NeatMS (2022) → RL-based peak pickers (2026) — active, publishable territory. The dataset callout is real: our prepared slice is 3.8 MB, and the capstone's Track B uses it.</a:t>
-            </a:r>
-          </a:p>
-          <a:p>
-            <a:endParaRPr/>
+              <a:rPr dirty="0"/>
+              <a:t>Melnikov et al., Analytical Chemistry 2020 — full citation on the reading list handout. The pipeline is precisely the detection reframe made real: take a candidate region of interest from raw LC-MS, one CNN decides peak vs. noise (the score), a second CNN finds the boundaries (the box), then integrate and report the area. Lineage if asked: </a:t>
+            </a:r>
+            <a:r>
+              <a:rPr dirty="0" err="1"/>
+              <a:t>PeakOnly</a:t>
+            </a:r>
+            <a:r>
+              <a:rPr dirty="0"/>
+              <a:t> (2020) → EVA (2021) → </a:t>
+            </a:r>
+            <a:r>
+              <a:rPr dirty="0" err="1"/>
+              <a:t>NeatMS</a:t>
+            </a:r>
+            <a:r>
+              <a:rPr dirty="0"/>
+              <a:t> (2022) → RL-based peak pickers (2026) — active, publishable territory. The dataset callout is real: our prepared slice is 3.8 MB, and the capstone's Track B uses it.</a:t>
+            </a:r>
+          </a:p>
+          <a:p>
+            <a:endParaRPr dirty="0"/>
           </a:p>
         </p:txBody>
       </p:sp>
@@ -5527,22 +5544,22 @@
       </p:sp>
       <p:pic>
         <p:nvPicPr>
-          <p:cNvPr id="5" name="Picture 4" descr="fig_output_size_youdo.png"/>
+          <p:cNvPr id="7" name="Picture 6" descr="fig_output_size_youdo.png"/>
           <p:cNvPicPr>
             <a:picLocks noChangeAspect="1"/>
           </p:cNvPicPr>
           <p:nvPr/>
         </p:nvPicPr>
         <p:blipFill>
-          <a:blip r:embed="rId3"/>
+          <a:blip r:embed="rId4"/>
           <a:stretch>
             <a:fillRect/>
           </a:stretch>
         </p:blipFill>
         <p:spPr>
           <a:xfrm>
-            <a:off x="2037841" y="1828800"/>
-            <a:ext cx="8085838" cy="3291840"/>
+            <a:off x="2037840" y="1828800"/>
+            <a:ext cx="8085839" cy="3291840"/>
           </a:xfrm>
           <a:prstGeom prst="rect">
             <a:avLst/>
@@ -6420,7 +6437,7 @@
         <p:spPr>
           <a:xfrm>
             <a:off x="548640" y="1920240"/>
-            <a:ext cx="10789920" cy="3797808"/>
+            <a:ext cx="10789920" cy="3108543"/>
           </a:xfrm>
           <a:prstGeom prst="rect">
             <a:avLst/>
@@ -6592,10 +6609,19 @@
                 </a:solidFill>
                 <a:latin typeface="Avenir Next"/>
               </a:rPr>
-              <a:t> Going deeper</a:t>
-            </a:r>
-            <a:r>
-              <a:rPr sz="2600" b="1" i="0" dirty="0">
+              <a:t> Application: </a:t>
+            </a:r>
+            <a:r>
+              <a:rPr lang="en-US" sz="2600" dirty="0">
+                <a:solidFill>
+                  <a:srgbClr val="1B2025"/>
+                </a:solidFill>
+                <a:latin typeface="Avenir Next"/>
+              </a:rPr>
+              <a:t>Object</a:t>
+            </a:r>
+            <a:r>
+              <a:rPr lang="en-US" sz="2600" b="1" i="0" dirty="0">
                 <a:solidFill>
                   <a:srgbClr val="0E7C7B"/>
                 </a:solidFill>
@@ -6604,28 +6630,13 @@
               <a:t> </a:t>
             </a:r>
             <a:r>
-              <a:rPr lang="en-US" sz="2600" dirty="0">
+              <a:rPr sz="2600" b="0" i="0" dirty="0">
+                <a:solidFill>
+                  <a:srgbClr val="1B2025"/>
+                </a:solidFill>
                 <a:latin typeface="Avenir Next"/>
               </a:rPr>
-              <a:t>(</a:t>
-            </a:r>
-            <a:r>
-              <a:rPr sz="2600" b="0" i="0" dirty="0" err="1">
-                <a:solidFill>
-                  <a:srgbClr val="1B2025"/>
-                </a:solidFill>
-                <a:latin typeface="Avenir Next"/>
-              </a:rPr>
-              <a:t>ResNet</a:t>
-            </a:r>
-            <a:r>
-              <a:rPr sz="2600" b="0" i="0" dirty="0">
-                <a:solidFill>
-                  <a:srgbClr val="1B2025"/>
-                </a:solidFill>
-                <a:latin typeface="Avenir Next"/>
-              </a:rPr>
-              <a:t>), then further (detection = peak-picking)</a:t>
+              <a:t>detection</a:t>
             </a:r>
             <a:r>
               <a:rPr sz="2100" b="0" i="0" dirty="0">
@@ -10404,16 +10415,25 @@
           <a:p>
             <a:pPr algn="ctr"/>
             <a:r>
-              <a:rPr sz="1200" b="1" i="0">
+              <a:rPr lang="en-US" sz="1200" b="1" i="0" dirty="0">
                 <a:solidFill>
                   <a:srgbClr val="0E7C7B"/>
                 </a:solidFill>
                 <a:latin typeface="Menlo"/>
               </a:rPr>
-              <a:t>MASS SPEC · </a:t>
-            </a:r>
-            <a:r>
-              <a:rPr sz="1700" b="0" i="0">
+              <a:t>MATH </a:t>
+            </a:r>
+            <a:r>
+              <a:rPr sz="1200" b="1" i="0" dirty="0">
+                <a:solidFill>
+                  <a:srgbClr val="0E7C7B"/>
+                </a:solidFill>
+                <a:latin typeface="Menlo"/>
+              </a:rPr>
+              <a:t>· </a:t>
+            </a:r>
+            <a:r>
+              <a:rPr sz="1700" b="0" i="0" dirty="0">
                 <a:solidFill>
                   <a:srgbClr val="3D444C"/>
                 </a:solidFill>
